--- a/docs/Eventspark Presentation.pptx
+++ b/docs/Eventspark Presentation.pptx
@@ -280,7 +280,7 @@
             <a:fld id="{11A6662E-FAF4-44BC-88B5-85A7CBFB6D30}" type="datetime1">
               <a:rPr lang="en-US" smtClean="0"/>
               <a:pPr/>
-              <a:t>2/18/2026</a:t>
+              <a:t>2/19/2026</a:t>
             </a:fld>
             <a:endParaRPr lang="en-US"/>
           </a:p>
@@ -491,7 +491,7 @@
           <a:p>
             <a:fld id="{4C559632-1575-4E14-B53B-3DC3D5ED3947}" type="datetime1">
               <a:rPr lang="en-US" smtClean="0"/>
-              <a:t>2/18/2026</a:t>
+              <a:t>2/19/2026</a:t>
             </a:fld>
             <a:endParaRPr lang="en-US"/>
           </a:p>
@@ -699,7 +699,7 @@
           <a:p>
             <a:fld id="{CC4A6868-2568-4CC9-B302-F37117B01A6E}" type="datetime1">
               <a:rPr lang="en-US" smtClean="0"/>
-              <a:t>2/18/2026</a:t>
+              <a:t>2/19/2026</a:t>
             </a:fld>
             <a:endParaRPr lang="en-US"/>
           </a:p>
@@ -902,7 +902,7 @@
           <a:p>
             <a:fld id="{0055F08A-1E71-4B2B-BB49-E743F2903911}" type="datetime1">
               <a:rPr lang="en-US" smtClean="0"/>
-              <a:t>2/18/2026</a:t>
+              <a:t>2/19/2026</a:t>
             </a:fld>
             <a:endParaRPr lang="en-US" dirty="0"/>
           </a:p>
@@ -1176,7 +1176,7 @@
           <a:p>
             <a:fld id="{15417D9E-721A-44BB-8863-9873FE64DA75}" type="datetime1">
               <a:rPr lang="en-US" smtClean="0"/>
-              <a:t>2/18/2026</a:t>
+              <a:t>2/19/2026</a:t>
             </a:fld>
             <a:endParaRPr lang="en-US"/>
           </a:p>
@@ -1446,7 +1446,7 @@
           <a:p>
             <a:fld id="{5F31DA2F-80B8-49CF-99FB-5ABCA53A607A}" type="datetime1">
               <a:rPr lang="en-US" smtClean="0"/>
-              <a:t>2/18/2026</a:t>
+              <a:t>2/19/2026</a:t>
             </a:fld>
             <a:endParaRPr lang="en-US"/>
           </a:p>
@@ -1859,7 +1859,7 @@
           <a:p>
             <a:fld id="{28852172-E6C9-4B6C-929A-A9DE3837BBF1}" type="datetime1">
               <a:rPr lang="en-US" smtClean="0"/>
-              <a:t>2/18/2026</a:t>
+              <a:t>2/19/2026</a:t>
             </a:fld>
             <a:endParaRPr lang="en-US"/>
           </a:p>
@@ -2005,7 +2005,7 @@
           <a:p>
             <a:fld id="{3AB41CFF-90C9-47B3-9DA1-F2BF8D839F7E}" type="datetime1">
               <a:rPr lang="en-US" smtClean="0"/>
-              <a:t>2/18/2026</a:t>
+              <a:t>2/19/2026</a:t>
             </a:fld>
             <a:endParaRPr lang="en-US"/>
           </a:p>
@@ -2118,7 +2118,7 @@
           <a:p>
             <a:fld id="{F06048FA-06AB-4884-A69B-986B96E68A24}" type="datetime1">
               <a:rPr lang="en-US" smtClean="0"/>
-              <a:t>2/18/2026</a:t>
+              <a:t>2/19/2026</a:t>
             </a:fld>
             <a:endParaRPr lang="en-US"/>
           </a:p>
@@ -2429,7 +2429,7 @@
           <a:p>
             <a:fld id="{50DB7ABA-0172-4F9C-889D-567164F66BCD}" type="datetime1">
               <a:rPr lang="en-US" smtClean="0"/>
-              <a:t>2/18/2026</a:t>
+              <a:t>2/19/2026</a:t>
             </a:fld>
             <a:endParaRPr lang="en-US"/>
           </a:p>
@@ -2720,7 +2720,7 @@
           <a:p>
             <a:fld id="{78AC6A5B-8AE7-4A41-B5A7-9ADC6686DC18}" type="datetime1">
               <a:rPr lang="en-US" smtClean="0"/>
-              <a:t>2/18/2026</a:t>
+              <a:t>2/19/2026</a:t>
             </a:fld>
             <a:endParaRPr lang="en-US"/>
           </a:p>
@@ -3066,7 +3066,7 @@
             <a:fld id="{57E0CF6C-748E-4B7A-BC8B-3011EF78ED13}" type="datetime1">
               <a:rPr lang="en-US" smtClean="0"/>
               <a:pPr/>
-              <a:t>2/18/2026</a:t>
+              <a:t>2/19/2026</a:t>
             </a:fld>
             <a:endParaRPr lang="en-US" dirty="0"/>
           </a:p>
@@ -4409,11 +4409,16 @@
               <a:t>: </a:t>
             </a:r>
             <a:r>
-              <a:rPr lang="en-US" dirty="0">
-                <a:ea typeface="+mn-lt"/>
-                <a:cs typeface="+mn-lt"/>
+              <a:rPr lang="en-US" b="1" u="sng" dirty="0">
+                <a:hlinkClick r:id="rId2"/>
               </a:rPr>
-              <a:t>https://github.com/csc340-uncg/sp26-project-template</a:t>
+              <a:t>https://jeremysm-school.github.io/</a:t>
+            </a:r>
+            <a:r>
+              <a:rPr lang="en-US" b="1" u="sng">
+                <a:hlinkClick r:id="rId2"/>
+              </a:rPr>
+              <a:t>Team3Eventspark/</a:t>
             </a:r>
             <a:endParaRPr lang="en-US" dirty="0"/>
           </a:p>
